--- a/Final Report Documentation/FYP_IF_Poster_template.pptx
+++ b/Final Report Documentation/FYP_IF_Poster_template.pptx
@@ -891,7 +891,7 @@
             </a:ln>
             <a:extLst>
               <a:ext uri="{91240B29-F687-4f45-9708-019B960494DF}">
-                <a14:hiddenLine xmlns:a14="http://schemas.microsoft.com/office/drawing/2010/main" xmlns="" w="9525">
+                <a14:hiddenLine xmlns="" xmlns:a14="http://schemas.microsoft.com/office/drawing/2010/main" w="9525">
                   <a:solidFill>
                     <a:srgbClr val="000000"/>
                   </a:solidFill>
@@ -1088,7 +1088,7 @@
           <a:p>
             <a:fld id="{B422669D-33D1-4404-A99D-C4224B9C8823}" type="datetimeFigureOut">
               <a:rPr lang="en-GB" smtClean="0"/>
-              <a:t>06/05/2026</a:t>
+              <a:t>07/05/2026</a:t>
             </a:fld>
             <a:endParaRPr lang="en-GB"/>
           </a:p>
@@ -1972,7 +1972,7 @@
             </a:ln>
             <a:extLst>
               <a:ext uri="{91240B29-F687-4f45-9708-019B960494DF}">
-                <a14:hiddenLine xmlns:a14="http://schemas.microsoft.com/office/drawing/2010/main" xmlns="" w="9525">
+                <a14:hiddenLine xmlns="" xmlns:a14="http://schemas.microsoft.com/office/drawing/2010/main" w="9525">
                   <a:solidFill>
                     <a:srgbClr val="000000"/>
                   </a:solidFill>
@@ -2189,7 +2189,7 @@
           <a:p>
             <a:fld id="{B422669D-33D1-4404-A99D-C4224B9C8823}" type="datetimeFigureOut">
               <a:rPr lang="en-GB" smtClean="0"/>
-              <a:t>06/05/2026</a:t>
+              <a:t>07/05/2026</a:t>
             </a:fld>
             <a:endParaRPr lang="en-GB"/>
           </a:p>
@@ -3058,7 +3058,7 @@
             </a:ln>
             <a:extLst>
               <a:ext uri="{91240B29-F687-4f45-9708-019B960494DF}">
-                <a14:hiddenLine xmlns:a14="http://schemas.microsoft.com/office/drawing/2010/main" xmlns="" w="9525">
+                <a14:hiddenLine xmlns="" xmlns:a14="http://schemas.microsoft.com/office/drawing/2010/main" w="9525">
                   <a:solidFill>
                     <a:srgbClr val="000000"/>
                   </a:solidFill>
@@ -3187,7 +3187,7 @@
           <a:p>
             <a:fld id="{B422669D-33D1-4404-A99D-C4224B9C8823}" type="datetimeFigureOut">
               <a:rPr lang="en-GB" smtClean="0"/>
-              <a:t>06/05/2026</a:t>
+              <a:t>07/05/2026</a:t>
             </a:fld>
             <a:endParaRPr lang="en-GB"/>
           </a:p>
@@ -4019,7 +4019,7 @@
             </a:ln>
             <a:extLst>
               <a:ext uri="{91240B29-F687-4f45-9708-019B960494DF}">
-                <a14:hiddenLine xmlns:a14="http://schemas.microsoft.com/office/drawing/2010/main" xmlns="" w="9525">
+                <a14:hiddenLine xmlns="" xmlns:a14="http://schemas.microsoft.com/office/drawing/2010/main" w="9525">
                   <a:solidFill>
                     <a:srgbClr val="000000"/>
                   </a:solidFill>
@@ -4302,7 +4302,7 @@
           <a:p>
             <a:fld id="{B422669D-33D1-4404-A99D-C4224B9C8823}" type="datetimeFigureOut">
               <a:rPr lang="en-GB" smtClean="0"/>
-              <a:t>06/05/2026</a:t>
+              <a:t>07/05/2026</a:t>
             </a:fld>
             <a:endParaRPr lang="en-GB"/>
           </a:p>
@@ -5134,7 +5134,7 @@
             </a:ln>
             <a:extLst>
               <a:ext uri="{91240B29-F687-4f45-9708-019B960494DF}">
-                <a14:hiddenLine xmlns:a14="http://schemas.microsoft.com/office/drawing/2010/main" xmlns="" w="9525">
+                <a14:hiddenLine xmlns="" xmlns:a14="http://schemas.microsoft.com/office/drawing/2010/main" w="9525">
                   <a:solidFill>
                     <a:srgbClr val="000000"/>
                   </a:solidFill>
@@ -5316,7 +5316,7 @@
           <a:p>
             <a:fld id="{B422669D-33D1-4404-A99D-C4224B9C8823}" type="datetimeFigureOut">
               <a:rPr lang="en-GB" smtClean="0"/>
-              <a:t>06/05/2026</a:t>
+              <a:t>07/05/2026</a:t>
             </a:fld>
             <a:endParaRPr lang="en-GB"/>
           </a:p>
@@ -5988,7 +5988,7 @@
           <a:p>
             <a:fld id="{B422669D-33D1-4404-A99D-C4224B9C8823}" type="datetimeFigureOut">
               <a:rPr lang="en-GB" smtClean="0"/>
-              <a:t>06/05/2026</a:t>
+              <a:t>07/05/2026</a:t>
             </a:fld>
             <a:endParaRPr lang="en-GB"/>
           </a:p>
@@ -6861,7 +6861,7 @@
           <a:p>
             <a:fld id="{B422669D-33D1-4404-A99D-C4224B9C8823}" type="datetimeFigureOut">
               <a:rPr lang="en-GB" smtClean="0"/>
-              <a:t>06/05/2026</a:t>
+              <a:t>07/05/2026</a:t>
             </a:fld>
             <a:endParaRPr lang="en-GB"/>
           </a:p>
@@ -7048,7 +7048,7 @@
           <a:p>
             <a:fld id="{B422669D-33D1-4404-A99D-C4224B9C8823}" type="datetimeFigureOut">
               <a:rPr lang="en-GB" smtClean="0"/>
-              <a:t>06/05/2026</a:t>
+              <a:t>07/05/2026</a:t>
             </a:fld>
             <a:endParaRPr lang="en-GB"/>
           </a:p>
@@ -7883,7 +7883,7 @@
           </a:ln>
           <a:extLst>
             <a:ext uri="{91240B29-F687-4f45-9708-019B960494DF}">
-              <a14:hiddenLine xmlns:a14="http://schemas.microsoft.com/office/drawing/2010/main" xmlns="" w="9525">
+              <a14:hiddenLine xmlns="" xmlns:a14="http://schemas.microsoft.com/office/drawing/2010/main" w="9525">
                 <a:solidFill>
                   <a:srgbClr val="000000"/>
                 </a:solidFill>
@@ -7997,7 +7997,7 @@
           <a:p>
             <a:fld id="{B422669D-33D1-4404-A99D-C4224B9C8823}" type="datetimeFigureOut">
               <a:rPr lang="en-GB" smtClean="0"/>
-              <a:t>06/05/2026</a:t>
+              <a:t>07/05/2026</a:t>
             </a:fld>
             <a:endParaRPr lang="en-GB"/>
           </a:p>
@@ -8229,7 +8229,7 @@
           <a:p>
             <a:fld id="{B422669D-33D1-4404-A99D-C4224B9C8823}" type="datetimeFigureOut">
               <a:rPr lang="en-GB" smtClean="0"/>
-              <a:t>06/05/2026</a:t>
+              <a:t>07/05/2026</a:t>
             </a:fld>
             <a:endParaRPr lang="en-GB"/>
           </a:p>
@@ -9058,7 +9058,7 @@
             </a:ln>
             <a:extLst>
               <a:ext uri="{91240B29-F687-4f45-9708-019B960494DF}">
-                <a14:hiddenLine xmlns:a14="http://schemas.microsoft.com/office/drawing/2010/main" xmlns="" w="9525">
+                <a14:hiddenLine xmlns="" xmlns:a14="http://schemas.microsoft.com/office/drawing/2010/main" w="9525">
                   <a:solidFill>
                     <a:srgbClr val="000000"/>
                   </a:solidFill>
@@ -9240,7 +9240,7 @@
           <a:p>
             <a:fld id="{B422669D-33D1-4404-A99D-C4224B9C8823}" type="datetimeFigureOut">
               <a:rPr lang="en-GB" smtClean="0"/>
-              <a:t>06/05/2026</a:t>
+              <a:t>07/05/2026</a:t>
             </a:fld>
             <a:endParaRPr lang="en-GB"/>
           </a:p>
@@ -9524,7 +9524,7 @@
           <a:p>
             <a:fld id="{B422669D-33D1-4404-A99D-C4224B9C8823}" type="datetimeFigureOut">
               <a:rPr lang="en-GB" smtClean="0"/>
-              <a:t>06/05/2026</a:t>
+              <a:t>07/05/2026</a:t>
             </a:fld>
             <a:endParaRPr lang="en-GB"/>
           </a:p>
@@ -9924,7 +9924,7 @@
           <a:p>
             <a:fld id="{B422669D-33D1-4404-A99D-C4224B9C8823}" type="datetimeFigureOut">
               <a:rPr lang="en-GB" smtClean="0"/>
-              <a:t>06/05/2026</a:t>
+              <a:t>07/05/2026</a:t>
             </a:fld>
             <a:endParaRPr lang="en-GB"/>
           </a:p>
@@ -10054,7 +10054,7 @@
           <a:p>
             <a:fld id="{B422669D-33D1-4404-A99D-C4224B9C8823}" type="datetimeFigureOut">
               <a:rPr lang="en-GB" smtClean="0"/>
-              <a:t>06/05/2026</a:t>
+              <a:t>07/05/2026</a:t>
             </a:fld>
             <a:endParaRPr lang="en-GB"/>
           </a:p>
@@ -10179,6 +10179,13 @@
             <a:schemeClr val="lt1"/>
           </a:fontRef>
         </p:style>
+        <p:txBody>
+          <a:bodyPr/>
+          <a:lstStyle/>
+          <a:p>
+            <a:endParaRPr lang="en-GB"/>
+          </a:p>
+        </p:txBody>
       </p:sp>
       <p:sp>
         <p:nvSpPr>
@@ -10197,7 +10204,7 @@
           <a:p>
             <a:fld id="{B422669D-33D1-4404-A99D-C4224B9C8823}" type="datetimeFigureOut">
               <a:rPr lang="en-GB" smtClean="0"/>
-              <a:t>06/05/2026</a:t>
+              <a:t>07/05/2026</a:t>
             </a:fld>
             <a:endParaRPr lang="en-GB"/>
           </a:p>
@@ -11056,7 +11063,7 @@
             </a:ln>
             <a:extLst>
               <a:ext uri="{91240B29-F687-4f45-9708-019B960494DF}">
-                <a14:hiddenLine xmlns:a14="http://schemas.microsoft.com/office/drawing/2010/main" xmlns="" w="9525">
+                <a14:hiddenLine xmlns="" xmlns:a14="http://schemas.microsoft.com/office/drawing/2010/main" w="9525">
                   <a:solidFill>
                     <a:srgbClr val="000000"/>
                   </a:solidFill>
@@ -11249,7 +11256,7 @@
           <a:p>
             <a:fld id="{B422669D-33D1-4404-A99D-C4224B9C8823}" type="datetimeFigureOut">
               <a:rPr lang="en-GB" smtClean="0"/>
-              <a:t>06/05/2026</a:t>
+              <a:t>07/05/2026</a:t>
             </a:fld>
             <a:endParaRPr lang="en-GB"/>
           </a:p>
@@ -12114,7 +12121,7 @@
             </a:ln>
             <a:extLst>
               <a:ext uri="{91240B29-F687-4f45-9708-019B960494DF}">
-                <a14:hiddenLine xmlns:a14="http://schemas.microsoft.com/office/drawing/2010/main" xmlns="" w="9525">
+                <a14:hiddenLine xmlns="" xmlns:a14="http://schemas.microsoft.com/office/drawing/2010/main" w="9525">
                   <a:solidFill>
                     <a:srgbClr val="000000"/>
                   </a:solidFill>
@@ -12331,7 +12338,7 @@
           <a:p>
             <a:fld id="{B422669D-33D1-4404-A99D-C4224B9C8823}" type="datetimeFigureOut">
               <a:rPr lang="en-GB" smtClean="0"/>
-              <a:t>06/05/2026</a:t>
+              <a:t>07/05/2026</a:t>
             </a:fld>
             <a:endParaRPr lang="en-GB"/>
           </a:p>
@@ -12531,6 +12538,13 @@
               <a:schemeClr val="lt1"/>
             </a:fontRef>
           </p:style>
+          <p:txBody>
+            <a:bodyPr/>
+            <a:lstStyle/>
+            <a:p>
+              <a:endParaRPr lang="en-GB"/>
+            </a:p>
+          </p:txBody>
         </p:sp>
         <p:sp>
           <p:nvSpPr>
@@ -12588,6 +12602,13 @@
               <a:schemeClr val="lt1"/>
             </a:fontRef>
           </p:style>
+          <p:txBody>
+            <a:bodyPr/>
+            <a:lstStyle/>
+            <a:p>
+              <a:endParaRPr lang="en-GB"/>
+            </a:p>
+          </p:txBody>
         </p:sp>
         <p:sp>
           <p:nvSpPr>
@@ -12645,6 +12666,13 @@
               <a:schemeClr val="lt1"/>
             </a:fontRef>
           </p:style>
+          <p:txBody>
+            <a:bodyPr/>
+            <a:lstStyle/>
+            <a:p>
+              <a:endParaRPr lang="en-GB"/>
+            </a:p>
+          </p:txBody>
         </p:sp>
         <p:sp>
           <p:nvSpPr>
@@ -12702,6 +12730,13 @@
               <a:schemeClr val="lt1"/>
             </a:fontRef>
           </p:style>
+          <p:txBody>
+            <a:bodyPr/>
+            <a:lstStyle/>
+            <a:p>
+              <a:endParaRPr lang="en-GB"/>
+            </a:p>
+          </p:txBody>
         </p:sp>
         <p:sp>
           <p:nvSpPr>
@@ -12759,6 +12794,13 @@
               <a:schemeClr val="lt1"/>
             </a:fontRef>
           </p:style>
+          <p:txBody>
+            <a:bodyPr/>
+            <a:lstStyle/>
+            <a:p>
+              <a:endParaRPr lang="en-GB"/>
+            </a:p>
+          </p:txBody>
         </p:sp>
         <p:sp>
           <p:nvSpPr>
@@ -12816,6 +12858,13 @@
               <a:schemeClr val="lt1"/>
             </a:fontRef>
           </p:style>
+          <p:txBody>
+            <a:bodyPr/>
+            <a:lstStyle/>
+            <a:p>
+              <a:endParaRPr lang="en-GB"/>
+            </a:p>
+          </p:txBody>
         </p:sp>
         <p:sp>
           <p:nvSpPr>
@@ -12963,6 +13012,13 @@
               <a:noFill/>
             </a:ln>
           </p:spPr>
+          <p:txBody>
+            <a:bodyPr/>
+            <a:lstStyle/>
+            <a:p>
+              <a:endParaRPr lang="en-GB"/>
+            </a:p>
+          </p:txBody>
         </p:sp>
         <p:sp>
           <p:nvSpPr>
@@ -13099,6 +13155,13 @@
               <a:noFill/>
             </a:ln>
           </p:spPr>
+          <p:txBody>
+            <a:bodyPr/>
+            <a:lstStyle/>
+            <a:p>
+              <a:endParaRPr lang="en-GB"/>
+            </a:p>
+          </p:txBody>
         </p:sp>
         <p:sp>
           <p:nvSpPr>
@@ -13164,7 +13227,7 @@
             </a:ln>
             <a:extLst>
               <a:ext uri="{91240B29-F687-4f45-9708-019B960494DF}">
-                <a14:hiddenLine xmlns:a14="http://schemas.microsoft.com/office/drawing/2010/main" xmlns="" w="9525">
+                <a14:hiddenLine xmlns="" xmlns:a14="http://schemas.microsoft.com/office/drawing/2010/main" w="9525">
                   <a:solidFill>
                     <a:srgbClr val="000000"/>
                   </a:solidFill>
@@ -13175,6 +13238,13 @@
               </a:ext>
             </a:extLst>
           </p:spPr>
+          <p:txBody>
+            <a:bodyPr/>
+            <a:lstStyle/>
+            <a:p>
+              <a:endParaRPr lang="en-GB"/>
+            </a:p>
+          </p:txBody>
         </p:sp>
       </p:grpSp>
       <p:sp>
@@ -13305,7 +13375,7 @@
           <a:p>
             <a:fld id="{B422669D-33D1-4404-A99D-C4224B9C8823}" type="datetimeFigureOut">
               <a:rPr lang="en-GB" smtClean="0"/>
-              <a:t>06/05/2026</a:t>
+              <a:t>07/05/2026</a:t>
             </a:fld>
             <a:endParaRPr lang="en-GB"/>
           </a:p>
@@ -13381,6 +13451,13 @@
             <a:schemeClr val="lt1"/>
           </a:fontRef>
         </p:style>
+        <p:txBody>
+          <a:bodyPr/>
+          <a:lstStyle/>
+          <a:p>
+            <a:endParaRPr lang="en-GB"/>
+          </a:p>
+        </p:txBody>
       </p:sp>
       <p:sp>
         <p:nvSpPr>
@@ -14319,16 +14396,13 @@
                 </a:solidFill>
               </a:defRPr>
             </a:pPr>
-            <a:r>
-              <a:rPr lang="en-GB" sz="2800" b="1" dirty="0">
-                <a:solidFill>
-                  <a:schemeClr val="tx1"/>
-                </a:solidFill>
-                <a:latin typeface="Arial" panose="020B0604020202020204" pitchFamily="34" charset="0"/>
-                <a:cs typeface="Arial" panose="020B0604020202020204" pitchFamily="34" charset="0"/>
-              </a:rPr>
-              <a:t>Methods</a:t>
-            </a:r>
+            <a:endParaRPr lang="en-GB" sz="2800" b="1" dirty="0">
+              <a:solidFill>
+                <a:schemeClr val="tx1"/>
+              </a:solidFill>
+              <a:latin typeface="Arial" panose="020B0604020202020204" pitchFamily="34" charset="0"/>
+              <a:cs typeface="Arial" panose="020B0604020202020204" pitchFamily="34" charset="0"/>
+            </a:endParaRPr>
           </a:p>
         </p:txBody>
       </p:sp>
@@ -14379,16 +14453,13 @@
           <a:lstStyle/>
           <a:p>
             <a:pPr algn="ctr"/>
-            <a:r>
-              <a:rPr lang="en-GB" sz="2800" b="1" dirty="0">
-                <a:solidFill>
-                  <a:schemeClr val="tx1"/>
-                </a:solidFill>
-                <a:latin typeface="Arial" panose="020B0604020202020204" pitchFamily="34" charset="0"/>
-                <a:cs typeface="Arial" panose="020B0604020202020204" pitchFamily="34" charset="0"/>
-              </a:rPr>
-              <a:t>Design</a:t>
-            </a:r>
+            <a:endParaRPr lang="en-GB" sz="2800" b="1" dirty="0">
+              <a:solidFill>
+                <a:schemeClr val="tx1"/>
+              </a:solidFill>
+              <a:latin typeface="Arial" panose="020B0604020202020204" pitchFamily="34" charset="0"/>
+              <a:cs typeface="Arial" panose="020B0604020202020204" pitchFamily="34" charset="0"/>
+            </a:endParaRPr>
           </a:p>
         </p:txBody>
       </p:sp>
@@ -15081,6 +15152,187 @@
           </a:p>
         </p:txBody>
       </p:sp>
+      <p:sp>
+        <p:nvSpPr>
+          <p:cNvPr id="10" name="TextBox 9">
+            <a:extLst>
+              <a:ext uri="{FF2B5EF4-FFF2-40B4-BE49-F238E27FC236}">
+                <a16:creationId xmlns:a16="http://schemas.microsoft.com/office/drawing/2014/main" id="{423034A7-D6CC-BA57-5749-83D70D38DE7F}"/>
+              </a:ext>
+            </a:extLst>
+          </p:cNvPr>
+          <p:cNvSpPr txBox="1"/>
+          <p:nvPr/>
+        </p:nvSpPr>
+        <p:spPr>
+          <a:xfrm>
+            <a:off x="6904901" y="2196167"/>
+            <a:ext cx="3566167" cy="3046988"/>
+          </a:xfrm>
+          <a:prstGeom prst="rect">
+            <a:avLst/>
+          </a:prstGeom>
+          <a:noFill/>
+        </p:spPr>
+        <p:txBody>
+          <a:bodyPr wrap="square" rtlCol="0">
+            <a:spAutoFit/>
+          </a:bodyPr>
+          <a:lstStyle/>
+          <a:p>
+            <a:pPr algn="ctr"/>
+            <a:r>
+              <a:rPr lang="en-GB" sz="2400" b="1" dirty="0">
+                <a:latin typeface="Arial" panose="020B0604020202020204" pitchFamily="34" charset="0"/>
+                <a:cs typeface="Arial" panose="020B0604020202020204" pitchFamily="34" charset="0"/>
+              </a:rPr>
+              <a:t>Methods</a:t>
+            </a:r>
+          </a:p>
+          <a:p>
+            <a:pPr algn="ctr"/>
+            <a:endParaRPr lang="en-GB" sz="2400" b="1" dirty="0">
+              <a:latin typeface="Arial" panose="020B0604020202020204" pitchFamily="34" charset="0"/>
+              <a:cs typeface="Arial" panose="020B0604020202020204" pitchFamily="34" charset="0"/>
+            </a:endParaRPr>
+          </a:p>
+          <a:p>
+            <a:pPr marL="285750" indent="-285750">
+              <a:buFont typeface="Arial" panose="020B0604020202020204" pitchFamily="34" charset="0"/>
+              <a:buChar char="•"/>
+            </a:pPr>
+            <a:r>
+              <a:rPr lang="en-GB" dirty="0"/>
+              <a:t>Raspberry Pi Pico WH</a:t>
+            </a:r>
+          </a:p>
+          <a:p>
+            <a:pPr marL="285750" indent="-285750">
+              <a:buFont typeface="Arial" panose="020B0604020202020204" pitchFamily="34" charset="0"/>
+              <a:buChar char="•"/>
+            </a:pPr>
+            <a:r>
+              <a:rPr lang="en-GB" dirty="0"/>
+              <a:t>MPU6050 (gyro/accelerometer)</a:t>
+            </a:r>
+          </a:p>
+          <a:p>
+            <a:pPr marL="285750" indent="-285750">
+              <a:buFont typeface="Arial" panose="020B0604020202020204" pitchFamily="34" charset="0"/>
+              <a:buChar char="•"/>
+            </a:pPr>
+            <a:r>
+              <a:rPr lang="en-GB" dirty="0"/>
+              <a:t>Breadboard, </a:t>
+            </a:r>
+            <a:r>
+              <a:rPr lang="en-GB" dirty="0" err="1"/>
+              <a:t>jumperwires</a:t>
+            </a:r>
+            <a:r>
+              <a:rPr lang="en-GB" dirty="0"/>
+              <a:t>, buttons and 3D printed Case</a:t>
+            </a:r>
+          </a:p>
+          <a:p>
+            <a:pPr marL="285750" indent="-285750">
+              <a:buFont typeface="Arial" panose="020B0604020202020204" pitchFamily="34" charset="0"/>
+              <a:buChar char="•"/>
+            </a:pPr>
+            <a:r>
+              <a:rPr lang="en-GB" dirty="0"/>
+              <a:t>Unity + C</a:t>
+            </a:r>
+            <a:r>
+              <a:rPr lang="en-US" dirty="0"/>
+              <a:t># + Thonny</a:t>
+            </a:r>
+            <a:endParaRPr lang="en-GB" dirty="0"/>
+          </a:p>
+          <a:p>
+            <a:pPr marL="285750" indent="-285750">
+              <a:buFont typeface="Arial" panose="020B0604020202020204" pitchFamily="34" charset="0"/>
+              <a:buChar char="•"/>
+            </a:pPr>
+            <a:r>
+              <a:rPr lang="en-GB" dirty="0"/>
+              <a:t>Data Gathering (13 Testers)</a:t>
+            </a:r>
+          </a:p>
+        </p:txBody>
+      </p:sp>
+      <p:pic>
+        <p:nvPicPr>
+          <p:cNvPr id="20" name="Picture 19">
+            <a:extLst>
+              <a:ext uri="{FF2B5EF4-FFF2-40B4-BE49-F238E27FC236}">
+                <a16:creationId xmlns:a16="http://schemas.microsoft.com/office/drawing/2014/main" id="{3D08C4EC-7D8D-D81A-7958-8B2A95B98223}"/>
+              </a:ext>
+            </a:extLst>
+          </p:cNvPr>
+          <p:cNvPicPr>
+            <a:picLocks noChangeAspect="1"/>
+          </p:cNvPicPr>
+          <p:nvPr/>
+        </p:nvPicPr>
+        <p:blipFill>
+          <a:blip r:embed="rId4">
+            <a:extLst>
+              <a:ext uri="{28A0092B-C50C-407E-A947-70E740481C1C}">
+                <a14:useLocalDpi xmlns:a14="http://schemas.microsoft.com/office/drawing/2010/main" val="0"/>
+              </a:ext>
+            </a:extLst>
+          </a:blip>
+          <a:stretch>
+            <a:fillRect/>
+          </a:stretch>
+        </p:blipFill>
+        <p:spPr>
+          <a:xfrm>
+            <a:off x="7112169" y="5641843"/>
+            <a:ext cx="1565328" cy="2771120"/>
+          </a:xfrm>
+          <a:prstGeom prst="rect">
+            <a:avLst/>
+          </a:prstGeom>
+        </p:spPr>
+      </p:pic>
+      <p:pic>
+        <p:nvPicPr>
+          <p:cNvPr id="22" name="Picture 21">
+            <a:extLst>
+              <a:ext uri="{FF2B5EF4-FFF2-40B4-BE49-F238E27FC236}">
+                <a16:creationId xmlns:a16="http://schemas.microsoft.com/office/drawing/2014/main" id="{4AA06834-3BEC-5581-6CD7-C48CAA0B05FE}"/>
+              </a:ext>
+            </a:extLst>
+          </p:cNvPr>
+          <p:cNvPicPr>
+            <a:picLocks noChangeAspect="1"/>
+          </p:cNvPicPr>
+          <p:nvPr/>
+        </p:nvPicPr>
+        <p:blipFill>
+          <a:blip r:embed="rId5">
+            <a:extLst>
+              <a:ext uri="{28A0092B-C50C-407E-A947-70E740481C1C}">
+                <a14:useLocalDpi xmlns:a14="http://schemas.microsoft.com/office/drawing/2010/main" val="0"/>
+              </a:ext>
+            </a:extLst>
+          </a:blip>
+          <a:stretch>
+            <a:fillRect/>
+          </a:stretch>
+        </p:blipFill>
+        <p:spPr>
+          <a:xfrm flipH="1">
+            <a:off x="8829889" y="5641025"/>
+            <a:ext cx="1565329" cy="2771938"/>
+          </a:xfrm>
+          <a:prstGeom prst="rect">
+            <a:avLst/>
+          </a:prstGeom>
+        </p:spPr>
+      </p:pic>
     </p:spTree>
   </p:cSld>
   <p:clrMapOvr>
